--- a/Презентация.pptx
+++ b/Презентация.pptx
@@ -5,48 +5,49 @@
     <p:sldMasterId id="2147483648" r:id="rId1"/>
   </p:sldMasterIdLst>
   <p:notesMasterIdLst>
-    <p:notesMasterId r:id="rId16"/>
+    <p:notesMasterId r:id="rId17"/>
   </p:notesMasterIdLst>
   <p:sldIdLst>
     <p:sldId id="256" r:id="rId2"/>
-    <p:sldId id="257" r:id="rId3"/>
-    <p:sldId id="269" r:id="rId4"/>
-    <p:sldId id="258" r:id="rId5"/>
-    <p:sldId id="262" r:id="rId6"/>
-    <p:sldId id="263" r:id="rId7"/>
-    <p:sldId id="268" r:id="rId8"/>
-    <p:sldId id="267" r:id="rId9"/>
-    <p:sldId id="266" r:id="rId10"/>
-    <p:sldId id="265" r:id="rId11"/>
-    <p:sldId id="259" r:id="rId12"/>
-    <p:sldId id="260" r:id="rId13"/>
-    <p:sldId id="270" r:id="rId14"/>
-    <p:sldId id="261" r:id="rId15"/>
+    <p:sldId id="271" r:id="rId3"/>
+    <p:sldId id="257" r:id="rId4"/>
+    <p:sldId id="269" r:id="rId5"/>
+    <p:sldId id="258" r:id="rId6"/>
+    <p:sldId id="262" r:id="rId7"/>
+    <p:sldId id="263" r:id="rId8"/>
+    <p:sldId id="268" r:id="rId9"/>
+    <p:sldId id="267" r:id="rId10"/>
+    <p:sldId id="266" r:id="rId11"/>
+    <p:sldId id="265" r:id="rId12"/>
+    <p:sldId id="259" r:id="rId13"/>
+    <p:sldId id="260" r:id="rId14"/>
+    <p:sldId id="270" r:id="rId15"/>
+    <p:sldId id="261" r:id="rId16"/>
   </p:sldIdLst>
   <p:sldSz cx="9144000" cy="5143500" type="screen16x9"/>
   <p:notesSz cx="5143500" cy="9144000"/>
   <p:embeddedFontLst>
     <p:embeddedFont>
       <p:font typeface="Book Antiqua" panose="02040602050305030304" pitchFamily="18" charset="0"/>
-      <p:regular r:id="rId17"/>
-      <p:bold r:id="rId18"/>
-      <p:italic r:id="rId19"/>
-      <p:boldItalic r:id="rId20"/>
+      <p:regular r:id="rId18"/>
+      <p:bold r:id="rId19"/>
+      <p:italic r:id="rId20"/>
+      <p:boldItalic r:id="rId21"/>
     </p:embeddedFont>
     <p:embeddedFont>
       <p:font typeface="Calibri" panose="020F0502020204030204" pitchFamily="34" charset="0"/>
-      <p:regular r:id="rId21"/>
-      <p:bold r:id="rId22"/>
-      <p:italic r:id="rId23"/>
-      <p:boldItalic r:id="rId24"/>
+      <p:regular r:id="rId22"/>
+      <p:bold r:id="rId23"/>
+      <p:italic r:id="rId24"/>
+      <p:boldItalic r:id="rId25"/>
     </p:embeddedFont>
     <p:embeddedFont>
       <p:font typeface="Kanit Light" panose="020B0604020202020204" charset="-34"/>
-      <p:regular r:id="rId25"/>
+      <p:regular r:id="rId26"/>
     </p:embeddedFont>
     <p:embeddedFont>
       <p:font typeface="Martel Sans" panose="020B0604020202020204" charset="0"/>
-      <p:regular r:id="rId26"/>
+      <p:regular r:id="rId27"/>
     </p:embeddedFont>
   </p:embeddedFontLst>
   <p:defaultTextStyle>
@@ -435,7 +436,7 @@
     </p:spTree>
     <p:extLst>
       <p:ext uri="{BB962C8B-B14F-4D97-AF65-F5344CB8AC3E}">
-        <p14:creationId xmlns:p14="http://schemas.microsoft.com/office/powerpoint/2010/main" val="2559781539"/>
+        <p14:creationId xmlns:p14="http://schemas.microsoft.com/office/powerpoint/2010/main" val="1115893833"/>
       </p:ext>
     </p:extLst>
   </p:cSld>
@@ -519,7 +520,7 @@
     </p:spTree>
     <p:extLst>
       <p:ext uri="{BB962C8B-B14F-4D97-AF65-F5344CB8AC3E}">
-        <p14:creationId xmlns:p14="http://schemas.microsoft.com/office/powerpoint/2010/main" val="1024086991"/>
+        <p14:creationId xmlns:p14="http://schemas.microsoft.com/office/powerpoint/2010/main" val="2559781539"/>
       </p:ext>
     </p:extLst>
   </p:cSld>
@@ -687,7 +688,7 @@
     </p:spTree>
     <p:extLst>
       <p:ext uri="{BB962C8B-B14F-4D97-AF65-F5344CB8AC3E}">
-        <p14:creationId xmlns:p14="http://schemas.microsoft.com/office/powerpoint/2010/main" val="1652760751"/>
+        <p14:creationId xmlns:p14="http://schemas.microsoft.com/office/powerpoint/2010/main" val="1024086991"/>
       </p:ext>
     </p:extLst>
   </p:cSld>
@@ -763,6 +764,90 @@
             <a:fld id="{F7021451-1387-4CA6-816F-3879F97B5CBC}" type="slidenum">
               <a:rPr lang="en-US"/>
               <a:t>14</a:t>
+            </a:fld>
+            <a:endParaRPr lang="en-US"/>
+          </a:p>
+        </p:txBody>
+      </p:sp>
+    </p:spTree>
+    <p:extLst>
+      <p:ext uri="{BB962C8B-B14F-4D97-AF65-F5344CB8AC3E}">
+        <p14:creationId xmlns:p14="http://schemas.microsoft.com/office/powerpoint/2010/main" val="1652760751"/>
+      </p:ext>
+    </p:extLst>
+  </p:cSld>
+  <p:clrMapOvr>
+    <a:masterClrMapping/>
+  </p:clrMapOvr>
+</p:notes>
+</file>
+
+<file path=ppt/notesSlides/notesSlide15.xml><?xml version="1.0" encoding="utf-8"?>
+<p:notes xmlns:a="http://schemas.openxmlformats.org/drawingml/2006/main" xmlns:r="http://schemas.openxmlformats.org/officeDocument/2006/relationships" xmlns:p="http://schemas.openxmlformats.org/presentationml/2006/main">
+  <p:cSld>
+    <p:spTree>
+      <p:nvGrpSpPr>
+        <p:cNvPr id="1" name=""/>
+        <p:cNvGrpSpPr/>
+        <p:nvPr/>
+      </p:nvGrpSpPr>
+      <p:grpSpPr>
+        <a:xfrm>
+          <a:off x="0" y="0"/>
+          <a:ext cx="0" cy="0"/>
+          <a:chOff x="0" y="0"/>
+          <a:chExt cx="0" cy="0"/>
+        </a:xfrm>
+      </p:grpSpPr>
+      <p:sp>
+        <p:nvSpPr>
+          <p:cNvPr id="2" name="Slide Image Placeholder 1"/>
+          <p:cNvSpPr>
+            <a:spLocks noGrp="1" noRot="1" noChangeAspect="1"/>
+          </p:cNvSpPr>
+          <p:nvPr>
+            <p:ph type="sldImg"/>
+          </p:nvPr>
+        </p:nvSpPr>
+        <p:spPr/>
+      </p:sp>
+      <p:sp>
+        <p:nvSpPr>
+          <p:cNvPr id="3" name="Notes Placeholder 2"/>
+          <p:cNvSpPr>
+            <a:spLocks noGrp="1"/>
+          </p:cNvSpPr>
+          <p:nvPr>
+            <p:ph type="body" idx="1"/>
+          </p:nvPr>
+        </p:nvSpPr>
+        <p:spPr/>
+        <p:txBody>
+          <a:bodyPr/>
+          <a:lstStyle/>
+          <a:p>
+            <a:endParaRPr lang="en-US" dirty="0"/>
+          </a:p>
+        </p:txBody>
+      </p:sp>
+      <p:sp>
+        <p:nvSpPr>
+          <p:cNvPr id="4" name="Slide Number Placeholder 3"/>
+          <p:cNvSpPr>
+            <a:spLocks noGrp="1"/>
+          </p:cNvSpPr>
+          <p:nvPr>
+            <p:ph type="sldNum" sz="quarter" idx="10"/>
+          </p:nvPr>
+        </p:nvSpPr>
+        <p:spPr/>
+        <p:txBody>
+          <a:bodyPr/>
+          <a:lstStyle/>
+          <a:p>
+            <a:fld id="{F7021451-1387-4CA6-816F-3879F97B5CBC}" type="slidenum">
+              <a:rPr lang="en-US"/>
+              <a:t>15</a:t>
             </a:fld>
             <a:endParaRPr lang="en-US"/>
           </a:p>
@@ -855,7 +940,7 @@
     </p:spTree>
     <p:extLst>
       <p:ext uri="{BB962C8B-B14F-4D97-AF65-F5344CB8AC3E}">
-        <p14:creationId xmlns:p14="http://schemas.microsoft.com/office/powerpoint/2010/main" val="1024086991"/>
+        <p14:creationId xmlns:p14="http://schemas.microsoft.com/office/powerpoint/2010/main" val="625827623"/>
       </p:ext>
     </p:extLst>
   </p:cSld>
@@ -939,7 +1024,7 @@
     </p:spTree>
     <p:extLst>
       <p:ext uri="{BB962C8B-B14F-4D97-AF65-F5344CB8AC3E}">
-        <p14:creationId xmlns:p14="http://schemas.microsoft.com/office/powerpoint/2010/main" val="180239440"/>
+        <p14:creationId xmlns:p14="http://schemas.microsoft.com/office/powerpoint/2010/main" val="1024086991"/>
       </p:ext>
     </p:extLst>
   </p:cSld>
@@ -1023,7 +1108,7 @@
     </p:spTree>
     <p:extLst>
       <p:ext uri="{BB962C8B-B14F-4D97-AF65-F5344CB8AC3E}">
-        <p14:creationId xmlns:p14="http://schemas.microsoft.com/office/powerpoint/2010/main" val="1024086991"/>
+        <p14:creationId xmlns:p14="http://schemas.microsoft.com/office/powerpoint/2010/main" val="180239440"/>
       </p:ext>
     </p:extLst>
   </p:cSld>
@@ -1107,7 +1192,7 @@
     </p:spTree>
     <p:extLst>
       <p:ext uri="{BB962C8B-B14F-4D97-AF65-F5344CB8AC3E}">
-        <p14:creationId xmlns:p14="http://schemas.microsoft.com/office/powerpoint/2010/main" val="4176329141"/>
+        <p14:creationId xmlns:p14="http://schemas.microsoft.com/office/powerpoint/2010/main" val="1024086991"/>
       </p:ext>
     </p:extLst>
   </p:cSld>
@@ -1191,7 +1276,7 @@
     </p:spTree>
     <p:extLst>
       <p:ext uri="{BB962C8B-B14F-4D97-AF65-F5344CB8AC3E}">
-        <p14:creationId xmlns:p14="http://schemas.microsoft.com/office/powerpoint/2010/main" val="2975975746"/>
+        <p14:creationId xmlns:p14="http://schemas.microsoft.com/office/powerpoint/2010/main" val="4176329141"/>
       </p:ext>
     </p:extLst>
   </p:cSld>
@@ -1275,7 +1360,7 @@
     </p:spTree>
     <p:extLst>
       <p:ext uri="{BB962C8B-B14F-4D97-AF65-F5344CB8AC3E}">
-        <p14:creationId xmlns:p14="http://schemas.microsoft.com/office/powerpoint/2010/main" val="2876770366"/>
+        <p14:creationId xmlns:p14="http://schemas.microsoft.com/office/powerpoint/2010/main" val="2975975746"/>
       </p:ext>
     </p:extLst>
   </p:cSld>
@@ -1359,7 +1444,7 @@
     </p:spTree>
     <p:extLst>
       <p:ext uri="{BB962C8B-B14F-4D97-AF65-F5344CB8AC3E}">
-        <p14:creationId xmlns:p14="http://schemas.microsoft.com/office/powerpoint/2010/main" val="3389128862"/>
+        <p14:creationId xmlns:p14="http://schemas.microsoft.com/office/powerpoint/2010/main" val="2876770366"/>
       </p:ext>
     </p:extLst>
   </p:cSld>
@@ -1443,7 +1528,7 @@
     </p:spTree>
     <p:extLst>
       <p:ext uri="{BB962C8B-B14F-4D97-AF65-F5344CB8AC3E}">
-        <p14:creationId xmlns:p14="http://schemas.microsoft.com/office/powerpoint/2010/main" val="1115893833"/>
+        <p14:creationId xmlns:p14="http://schemas.microsoft.com/office/powerpoint/2010/main" val="3389128862"/>
       </p:ext>
     </p:extLst>
   </p:cSld>
@@ -3390,6 +3475,150 @@
         </p:nvSpPr>
         <p:spPr>
           <a:xfrm>
+            <a:off x="0" y="1138204"/>
+            <a:ext cx="9144000" cy="4005295"/>
+          </a:xfrm>
+          <a:prstGeom prst="rect">
+            <a:avLst/>
+          </a:prstGeom>
+          <a:solidFill>
+            <a:srgbClr val="DFECE9"/>
+          </a:solidFill>
+          <a:ln/>
+        </p:spPr>
+      </p:sp>
+      <p:sp>
+        <p:nvSpPr>
+          <p:cNvPr id="4" name="Text 1"/>
+          <p:cNvSpPr/>
+          <p:nvPr/>
+        </p:nvSpPr>
+        <p:spPr>
+          <a:xfrm>
+            <a:off x="338903" y="76043"/>
+            <a:ext cx="8670814" cy="708720"/>
+          </a:xfrm>
+          <a:prstGeom prst="rect">
+            <a:avLst/>
+          </a:prstGeom>
+          <a:noFill/>
+          <a:ln/>
+        </p:spPr>
+        <p:txBody>
+          <a:bodyPr wrap="square" lIns="0" tIns="0" rIns="0" bIns="0" rtlCol="0" anchor="t">
+            <a:noAutofit/>
+          </a:bodyPr>
+          <a:lstStyle/>
+          <a:p>
+            <a:pPr marL="0" indent="0" algn="l">
+              <a:lnSpc>
+                <a:spcPct val="104000"/>
+              </a:lnSpc>
+              <a:buNone/>
+            </a:pPr>
+            <a:r>
+              <a:rPr lang="ru-RU" sz="3200" dirty="0">
+                <a:solidFill>
+                  <a:srgbClr val="272D45"/>
+                </a:solidFill>
+                <a:latin typeface="Kanit Light" pitchFamily="34" charset="0"/>
+                <a:ea typeface="Kanit Light" pitchFamily="34" charset="-122"/>
+                <a:cs typeface="Kanit Light" pitchFamily="34" charset="-120"/>
+              </a:rPr>
+              <a:t>Фрагмент </a:t>
+            </a:r>
+            <a:r>
+              <a:rPr lang="en-US" sz="3200" dirty="0">
+                <a:solidFill>
+                  <a:srgbClr val="272D45"/>
+                </a:solidFill>
+                <a:latin typeface="Kanit Light" pitchFamily="34" charset="0"/>
+                <a:ea typeface="Kanit Light" pitchFamily="34" charset="-122"/>
+                <a:cs typeface="Kanit Light" pitchFamily="34" charset="-120"/>
+              </a:rPr>
+              <a:t>ER-</a:t>
+            </a:r>
+            <a:r>
+              <a:rPr lang="ru-RU" sz="3200" dirty="0">
+                <a:solidFill>
+                  <a:srgbClr val="272D45"/>
+                </a:solidFill>
+                <a:latin typeface="Kanit Light" pitchFamily="34" charset="0"/>
+                <a:ea typeface="Kanit Light" pitchFamily="34" charset="-122"/>
+                <a:cs typeface="Kanit Light" pitchFamily="34" charset="-120"/>
+              </a:rPr>
+              <a:t>диаграммы «Медицинские записи»</a:t>
+            </a:r>
+            <a:endParaRPr lang="en-US" sz="3200" dirty="0"/>
+          </a:p>
+        </p:txBody>
+      </p:sp>
+      <p:pic>
+        <p:nvPicPr>
+          <p:cNvPr id="5" name="Рисунок 4">
+            <a:extLst>
+              <a:ext uri="{FF2B5EF4-FFF2-40B4-BE49-F238E27FC236}">
+                <a16:creationId xmlns:a16="http://schemas.microsoft.com/office/drawing/2014/main" id="{3F23E548-3C79-472C-9AF1-6CE5FABCC6D8}"/>
+              </a:ext>
+            </a:extLst>
+          </p:cNvPr>
+          <p:cNvPicPr/>
+          <p:nvPr/>
+        </p:nvPicPr>
+        <p:blipFill>
+          <a:blip r:embed="rId3"/>
+          <a:stretch>
+            <a:fillRect/>
+          </a:stretch>
+        </p:blipFill>
+        <p:spPr bwMode="auto">
+          <a:xfrm>
+            <a:off x="338904" y="1182965"/>
+            <a:ext cx="8536532" cy="3884492"/>
+          </a:xfrm>
+          <a:prstGeom prst="rect">
+            <a:avLst/>
+          </a:prstGeom>
+        </p:spPr>
+      </p:pic>
+    </p:spTree>
+    <p:extLst>
+      <p:ext uri="{BB962C8B-B14F-4D97-AF65-F5344CB8AC3E}">
+        <p14:creationId xmlns:p14="http://schemas.microsoft.com/office/powerpoint/2010/main" val="3599697436"/>
+      </p:ext>
+    </p:extLst>
+  </p:cSld>
+  <p:clrMapOvr>
+    <a:masterClrMapping/>
+  </p:clrMapOvr>
+</p:sld>
+</file>
+
+<file path=ppt/slides/slide11.xml><?xml version="1.0" encoding="utf-8"?>
+<p:sld xmlns:a="http://schemas.openxmlformats.org/drawingml/2006/main" xmlns:r="http://schemas.openxmlformats.org/officeDocument/2006/relationships" xmlns:p="http://schemas.openxmlformats.org/presentationml/2006/main">
+  <p:cSld>
+    <p:spTree>
+      <p:nvGrpSpPr>
+        <p:cNvPr id="1" name=""/>
+        <p:cNvGrpSpPr/>
+        <p:nvPr/>
+      </p:nvGrpSpPr>
+      <p:grpSpPr>
+        <a:xfrm>
+          <a:off x="0" y="0"/>
+          <a:ext cx="0" cy="0"/>
+          <a:chOff x="0" y="0"/>
+          <a:chExt cx="0" cy="0"/>
+        </a:xfrm>
+      </p:grpSpPr>
+      <p:sp>
+        <p:nvSpPr>
+          <p:cNvPr id="2" name="Shape 0"/>
+          <p:cNvSpPr/>
+          <p:nvPr/>
+        </p:nvSpPr>
+        <p:spPr>
+          <a:xfrm>
             <a:off x="0" y="601074"/>
             <a:ext cx="9144000" cy="4542425"/>
           </a:xfrm>
@@ -3509,7 +3738,7 @@
 </p:sld>
 </file>
 
-<file path=ppt/slides/slide11.xml><?xml version="1.0" encoding="utf-8"?>
+<file path=ppt/slides/slide12.xml><?xml version="1.0" encoding="utf-8"?>
 <p:sld xmlns:a="http://schemas.openxmlformats.org/drawingml/2006/main" xmlns:r="http://schemas.openxmlformats.org/officeDocument/2006/relationships" xmlns:p="http://schemas.openxmlformats.org/presentationml/2006/main">
   <p:cSld name="Slide 4">
     <p:spTree>
@@ -3912,7 +4141,7 @@
 </p:sld>
 </file>
 
-<file path=ppt/slides/slide12.xml><?xml version="1.0" encoding="utf-8"?>
+<file path=ppt/slides/slide13.xml><?xml version="1.0" encoding="utf-8"?>
 <p:sld xmlns:a="http://schemas.openxmlformats.org/drawingml/2006/main" xmlns:r="http://schemas.openxmlformats.org/officeDocument/2006/relationships" xmlns:p="http://schemas.openxmlformats.org/presentationml/2006/main">
   <p:cSld name="Slide 5">
     <p:spTree>
@@ -4678,7 +4907,7 @@
 </p:sld>
 </file>
 
-<file path=ppt/slides/slide13.xml><?xml version="1.0" encoding="utf-8"?>
+<file path=ppt/slides/slide14.xml><?xml version="1.0" encoding="utf-8"?>
 <p:sld xmlns:a="http://schemas.openxmlformats.org/drawingml/2006/main" xmlns:r="http://schemas.openxmlformats.org/officeDocument/2006/relationships" xmlns:p="http://schemas.openxmlformats.org/presentationml/2006/main">
   <p:cSld>
     <p:spTree>
@@ -4954,7 +5183,7 @@
 </p:sld>
 </file>
 
-<file path=ppt/slides/slide14.xml><?xml version="1.0" encoding="utf-8"?>
+<file path=ppt/slides/slide15.xml><?xml version="1.0" encoding="utf-8"?>
 <p:sld xmlns:a="http://schemas.openxmlformats.org/drawingml/2006/main" xmlns:r="http://schemas.openxmlformats.org/officeDocument/2006/relationships" xmlns:p="http://schemas.openxmlformats.org/presentationml/2006/main">
   <p:cSld name="Slide 6">
     <p:spTree>
@@ -4979,7 +5208,7 @@
         </p:nvSpPr>
         <p:spPr>
           <a:xfrm>
-            <a:off x="465162" y="74116"/>
+            <a:off x="1027870" y="182821"/>
             <a:ext cx="3115270" cy="332259"/>
           </a:xfrm>
           <a:prstGeom prst="rect">
@@ -4999,7 +5228,7 @@
               <a:buNone/>
             </a:pPr>
             <a:r>
-              <a:rPr lang="en-US" sz="4000" dirty="0">
+              <a:rPr lang="ru-RU" sz="4000" dirty="0">
                 <a:solidFill>
                   <a:srgbClr val="272D45"/>
                 </a:solidFill>
@@ -5007,7 +5236,18 @@
                 <a:ea typeface="Kanit Light" pitchFamily="34" charset="-122"/>
                 <a:cs typeface="Kanit Light" pitchFamily="34" charset="-120"/>
               </a:rPr>
-              <a:t>Заключение</a:t>
+              <a:t>Демонстрация </a:t>
+            </a:r>
+            <a:r>
+              <a:rPr lang="ru-RU" sz="4000">
+                <a:solidFill>
+                  <a:srgbClr val="272D45"/>
+                </a:solidFill>
+                <a:latin typeface="Kanit Light" pitchFamily="34" charset="0"/>
+                <a:ea typeface="Kanit Light" pitchFamily="34" charset="-122"/>
+                <a:cs typeface="Kanit Light" pitchFamily="34" charset="-120"/>
+              </a:rPr>
+              <a:t>реальной части</a:t>
             </a:r>
             <a:endParaRPr lang="en-US" sz="4000" dirty="0"/>
           </a:p>
@@ -5028,7 +5268,7 @@
         </p:blipFill>
         <p:spPr>
           <a:xfrm>
-            <a:off x="465162" y="1285801"/>
+            <a:off x="2958980" y="1349745"/>
             <a:ext cx="3090937" cy="3090937"/>
           </a:xfrm>
           <a:prstGeom prst="rect">
@@ -5036,16 +5276,41 @@
           </a:prstGeom>
         </p:spPr>
       </p:pic>
-      <p:sp>
-        <p:nvSpPr>
-          <p:cNvPr id="4" name="Text 1"/>
+    </p:spTree>
+  </p:cSld>
+  <p:clrMapOvr>
+    <a:masterClrMapping/>
+  </p:clrMapOvr>
+</p:sld>
+</file>
+
+<file path=ppt/slides/slide2.xml><?xml version="1.0" encoding="utf-8"?>
+<p:sld xmlns:a="http://schemas.openxmlformats.org/drawingml/2006/main" xmlns:r="http://schemas.openxmlformats.org/officeDocument/2006/relationships" xmlns:p="http://schemas.openxmlformats.org/presentationml/2006/main">
+  <p:cSld>
+    <p:spTree>
+      <p:nvGrpSpPr>
+        <p:cNvPr id="1" name=""/>
+        <p:cNvGrpSpPr/>
+        <p:nvPr/>
+      </p:nvGrpSpPr>
+      <p:grpSpPr>
+        <a:xfrm>
+          <a:off x="0" y="0"/>
+          <a:ext cx="0" cy="0"/>
+          <a:chOff x="0" y="0"/>
+          <a:chExt cx="0" cy="0"/>
+        </a:xfrm>
+      </p:grpSpPr>
+      <p:sp>
+        <p:nvSpPr>
+          <p:cNvPr id="2" name="Text 0"/>
           <p:cNvSpPr/>
           <p:nvPr/>
         </p:nvSpPr>
         <p:spPr>
           <a:xfrm>
-            <a:off x="3580432" y="640081"/>
-            <a:ext cx="5103093" cy="891540"/>
+            <a:off x="384264" y="0"/>
+            <a:ext cx="2578819" cy="238125"/>
           </a:xfrm>
           <a:prstGeom prst="rect">
             <a:avLst/>
@@ -5054,161 +5319,61 @@
           <a:ln/>
         </p:spPr>
         <p:txBody>
-          <a:bodyPr wrap="square" lIns="0" tIns="0" rIns="0" bIns="0" rtlCol="0" anchor="t">
-            <a:normAutofit lnSpcReduction="10000"/>
-          </a:bodyPr>
+          <a:bodyPr wrap="none" lIns="0" tIns="0" rIns="0" bIns="0" rtlCol="0" anchor="t"/>
           <a:lstStyle/>
           <a:p>
             <a:pPr marL="0" indent="0" algn="l">
               <a:lnSpc>
-                <a:spcPct val="129000"/>
+                <a:spcPct val="104000"/>
               </a:lnSpc>
               <a:buNone/>
             </a:pPr>
             <a:r>
-              <a:rPr lang="en-US" sz="1600" dirty="0">
-                <a:solidFill>
-                  <a:srgbClr val="2C3249"/>
-                </a:solidFill>
-                <a:latin typeface="Martel Sans" pitchFamily="34" charset="0"/>
-                <a:ea typeface="Martel Sans" pitchFamily="34" charset="-122"/>
-                <a:cs typeface="Martel Sans" pitchFamily="34" charset="-120"/>
-              </a:rPr>
-              <a:t>В рамках дипломного </a:t>
-            </a:r>
-            <a:r>
-              <a:rPr lang="en-US" sz="1600" dirty="0" err="1">
-                <a:solidFill>
-                  <a:srgbClr val="2C3249"/>
-                </a:solidFill>
-                <a:latin typeface="Martel Sans" pitchFamily="34" charset="0"/>
-                <a:ea typeface="Martel Sans" pitchFamily="34" charset="-122"/>
-                <a:cs typeface="Martel Sans" pitchFamily="34" charset="-120"/>
-              </a:rPr>
-              <a:t>проекта</a:t>
-            </a:r>
-            <a:r>
-              <a:rPr lang="en-US" sz="1600" dirty="0">
-                <a:solidFill>
-                  <a:srgbClr val="2C3249"/>
-                </a:solidFill>
-                <a:latin typeface="Martel Sans" pitchFamily="34" charset="0"/>
-                <a:ea typeface="Martel Sans" pitchFamily="34" charset="-122"/>
-                <a:cs typeface="Martel Sans" pitchFamily="34" charset="-120"/>
-              </a:rPr>
-              <a:t> </a:t>
-            </a:r>
-            <a:r>
-              <a:rPr lang="en-US" sz="1600" dirty="0" err="1">
-                <a:solidFill>
-                  <a:srgbClr val="2C3249"/>
-                </a:solidFill>
-                <a:latin typeface="Martel Sans" pitchFamily="34" charset="0"/>
-                <a:ea typeface="Martel Sans" pitchFamily="34" charset="-122"/>
-                <a:cs typeface="Martel Sans" pitchFamily="34" charset="-120"/>
-              </a:rPr>
-              <a:t>спроектирован</a:t>
-            </a:r>
-            <a:r>
-              <a:rPr lang="ru-RU" sz="1600" dirty="0">
-                <a:solidFill>
-                  <a:srgbClr val="2C3249"/>
-                </a:solidFill>
-                <a:latin typeface="Martel Sans" pitchFamily="34" charset="0"/>
-                <a:ea typeface="Martel Sans" pitchFamily="34" charset="-122"/>
-                <a:cs typeface="Martel Sans" pitchFamily="34" charset="-120"/>
-              </a:rPr>
-              <a:t>о</a:t>
-            </a:r>
-            <a:r>
-              <a:rPr lang="en-US" sz="1600" dirty="0">
-                <a:solidFill>
-                  <a:srgbClr val="2C3249"/>
-                </a:solidFill>
-                <a:latin typeface="Martel Sans" pitchFamily="34" charset="0"/>
-                <a:ea typeface="Martel Sans" pitchFamily="34" charset="-122"/>
-                <a:cs typeface="Martel Sans" pitchFamily="34" charset="-120"/>
-              </a:rPr>
-              <a:t> и </a:t>
-            </a:r>
-            <a:r>
-              <a:rPr lang="en-US" sz="1600" dirty="0" err="1">
-                <a:solidFill>
-                  <a:srgbClr val="2C3249"/>
-                </a:solidFill>
-                <a:latin typeface="Martel Sans" pitchFamily="34" charset="0"/>
-                <a:ea typeface="Martel Sans" pitchFamily="34" charset="-122"/>
-                <a:cs typeface="Martel Sans" pitchFamily="34" charset="-120"/>
-              </a:rPr>
-              <a:t>реализован</a:t>
-            </a:r>
-            <a:r>
-              <a:rPr lang="ru-RU" sz="1600" dirty="0">
-                <a:solidFill>
-                  <a:srgbClr val="2C3249"/>
-                </a:solidFill>
-                <a:latin typeface="Martel Sans" pitchFamily="34" charset="0"/>
-                <a:ea typeface="Martel Sans" pitchFamily="34" charset="-122"/>
-                <a:cs typeface="Martel Sans" pitchFamily="34" charset="-120"/>
-              </a:rPr>
-              <a:t>о</a:t>
-            </a:r>
-            <a:r>
-              <a:rPr lang="en-US" sz="1600" dirty="0">
-                <a:solidFill>
-                  <a:srgbClr val="2C3249"/>
-                </a:solidFill>
-                <a:latin typeface="Martel Sans" pitchFamily="34" charset="0"/>
-                <a:ea typeface="Martel Sans" pitchFamily="34" charset="-122"/>
-                <a:cs typeface="Martel Sans" pitchFamily="34" charset="-120"/>
-              </a:rPr>
-              <a:t> </a:t>
-            </a:r>
-            <a:r>
-              <a:rPr lang="ru-RU" sz="1600" dirty="0">
-                <a:solidFill>
-                  <a:srgbClr val="2C3249"/>
-                </a:solidFill>
-                <a:latin typeface="Martel Sans" pitchFamily="34" charset="0"/>
-                <a:ea typeface="Martel Sans" pitchFamily="34" charset="-122"/>
-                <a:cs typeface="Martel Sans" pitchFamily="34" charset="-120"/>
-              </a:rPr>
-              <a:t>приложение</a:t>
-            </a:r>
-            <a:r>
-              <a:rPr lang="en-US" sz="1600" dirty="0">
-                <a:solidFill>
-                  <a:srgbClr val="2C3249"/>
-                </a:solidFill>
-                <a:latin typeface="Martel Sans" pitchFamily="34" charset="0"/>
-                <a:ea typeface="Martel Sans" pitchFamily="34" charset="-122"/>
-                <a:cs typeface="Martel Sans" pitchFamily="34" charset="-120"/>
-              </a:rPr>
-              <a:t> для клиники «Верный </a:t>
-            </a:r>
-            <a:r>
-              <a:rPr lang="en-US" sz="1600" dirty="0" err="1">
-                <a:solidFill>
-                  <a:srgbClr val="2C3249"/>
-                </a:solidFill>
-                <a:latin typeface="Martel Sans" pitchFamily="34" charset="0"/>
-                <a:ea typeface="Martel Sans" pitchFamily="34" charset="-122"/>
-                <a:cs typeface="Martel Sans" pitchFamily="34" charset="-120"/>
-              </a:rPr>
-              <a:t>друг</a:t>
-            </a:r>
-            <a:r>
-              <a:rPr lang="en-US" sz="1600" dirty="0">
-                <a:solidFill>
-                  <a:srgbClr val="2C3249"/>
-                </a:solidFill>
-                <a:latin typeface="Martel Sans" pitchFamily="34" charset="0"/>
-                <a:ea typeface="Martel Sans" pitchFamily="34" charset="-122"/>
-                <a:cs typeface="Martel Sans" pitchFamily="34" charset="-120"/>
-              </a:rPr>
-              <a:t>».</a:t>
-            </a:r>
-            <a:endParaRPr lang="en-US" sz="1600" dirty="0"/>
+              <a:rPr lang="ru-RU" sz="4000" dirty="0">
+                <a:solidFill>
+                  <a:srgbClr val="272D45"/>
+                </a:solidFill>
+                <a:latin typeface="Kanit Light" pitchFamily="34" charset="0"/>
+                <a:ea typeface="Kanit Light" pitchFamily="34" charset="-122"/>
+                <a:cs typeface="Kanit Light" pitchFamily="34" charset="-120"/>
+              </a:rPr>
+              <a:t>Предметная область</a:t>
+            </a:r>
+            <a:endParaRPr lang="en-US" sz="4000" dirty="0"/>
+          </a:p>
+        </p:txBody>
+      </p:sp>
+      <p:sp>
+        <p:nvSpPr>
+          <p:cNvPr id="4" name="Shape 1"/>
+          <p:cNvSpPr/>
+          <p:nvPr/>
+        </p:nvSpPr>
+        <p:spPr>
+          <a:xfrm>
+            <a:off x="380767" y="667032"/>
+            <a:ext cx="8382466" cy="4288632"/>
+          </a:xfrm>
+          <a:prstGeom prst="roundRect">
+            <a:avLst>
+              <a:gd name="adj" fmla="val 4337"/>
+            </a:avLst>
+          </a:prstGeom>
+          <a:solidFill>
+            <a:srgbClr val="DFECE9"/>
+          </a:solidFill>
+          <a:ln w="4763">
+            <a:solidFill>
+              <a:srgbClr val="C5D2CF"/>
+            </a:solidFill>
+            <a:prstDash val="solid"/>
+          </a:ln>
+        </p:spPr>
+        <p:txBody>
+          <a:bodyPr/>
+          <a:lstStyle/>
+          <a:p>
+            <a:endParaRPr lang="ru-RU" sz="1600" dirty="0"/>
           </a:p>
         </p:txBody>
       </p:sp>
@@ -5220,8 +5385,8 @@
         </p:nvSpPr>
         <p:spPr>
           <a:xfrm>
-            <a:off x="3580432" y="1973534"/>
-            <a:ext cx="4798516" cy="2659425"/>
+            <a:off x="4452640" y="518964"/>
+            <a:ext cx="1190625" cy="325099"/>
           </a:xfrm>
           <a:prstGeom prst="rect">
             <a:avLst/>
@@ -5230,138 +5395,29 @@
           <a:ln/>
         </p:spPr>
         <p:txBody>
-          <a:bodyPr wrap="square" lIns="0" tIns="0" rIns="0" bIns="0" rtlCol="0" anchor="t">
-            <a:normAutofit fontScale="92500"/>
-          </a:bodyPr>
+          <a:bodyPr wrap="none" lIns="0" tIns="0" rIns="0" bIns="0" rtlCol="0" anchor="t"/>
           <a:lstStyle/>
           <a:p>
-            <a:pPr marL="342900" indent="-342900" algn="l">
+            <a:pPr marL="0" indent="0" algn="l">
               <a:lnSpc>
-                <a:spcPct val="150000"/>
+                <a:spcPct val="104000"/>
               </a:lnSpc>
-              <a:buSzPct val="100000"/>
-              <a:buFontTx/>
-              <a:buChar char="―"/>
+              <a:buNone/>
             </a:pPr>
-            <a:r>
-              <a:rPr lang="en-US" sz="1600" dirty="0">
-                <a:solidFill>
-                  <a:srgbClr val="2C3249"/>
-                </a:solidFill>
-                <a:latin typeface="Martel Sans" pitchFamily="34" charset="0"/>
-                <a:ea typeface="Martel Sans" pitchFamily="34" charset="-122"/>
-                <a:cs typeface="Martel Sans" pitchFamily="34" charset="-120"/>
-              </a:rPr>
-              <a:t>Реализованы </a:t>
-            </a:r>
-            <a:r>
-              <a:rPr lang="en-US" sz="1600" dirty="0" err="1">
-                <a:solidFill>
-                  <a:srgbClr val="2C3249"/>
-                </a:solidFill>
-                <a:latin typeface="Martel Sans" pitchFamily="34" charset="0"/>
-                <a:ea typeface="Martel Sans" pitchFamily="34" charset="-122"/>
-                <a:cs typeface="Martel Sans" pitchFamily="34" charset="-120"/>
-              </a:rPr>
-              <a:t>основные</a:t>
-            </a:r>
-            <a:r>
-              <a:rPr lang="en-US" sz="1600" dirty="0">
-                <a:solidFill>
-                  <a:srgbClr val="2C3249"/>
-                </a:solidFill>
-                <a:latin typeface="Martel Sans" pitchFamily="34" charset="0"/>
-                <a:ea typeface="Martel Sans" pitchFamily="34" charset="-122"/>
-                <a:cs typeface="Martel Sans" pitchFamily="34" charset="-120"/>
-              </a:rPr>
-              <a:t> </a:t>
-            </a:r>
-            <a:r>
-              <a:rPr lang="en-US" sz="1600" dirty="0" err="1">
-                <a:solidFill>
-                  <a:srgbClr val="2C3249"/>
-                </a:solidFill>
-                <a:latin typeface="Martel Sans" pitchFamily="34" charset="0"/>
-                <a:ea typeface="Martel Sans" pitchFamily="34" charset="-122"/>
-                <a:cs typeface="Martel Sans" pitchFamily="34" charset="-120"/>
-              </a:rPr>
-              <a:t>бизнес-функции</a:t>
-            </a:r>
-            <a:r>
-              <a:rPr lang="en-US" sz="1600" dirty="0">
-                <a:solidFill>
-                  <a:srgbClr val="2C3249"/>
-                </a:solidFill>
-                <a:latin typeface="Martel Sans" pitchFamily="34" charset="0"/>
-                <a:ea typeface="Martel Sans" pitchFamily="34" charset="-122"/>
-                <a:cs typeface="Martel Sans" pitchFamily="34" charset="-120"/>
-              </a:rPr>
-              <a:t>.</a:t>
-            </a:r>
-            <a:endParaRPr lang="en-US" sz="1600" dirty="0"/>
-          </a:p>
-          <a:p>
-            <a:pPr marL="342900" indent="-342900" algn="l">
-              <a:lnSpc>
-                <a:spcPct val="150000"/>
-              </a:lnSpc>
-              <a:buSzPct val="100000"/>
-              <a:buFontTx/>
-              <a:buChar char="―"/>
-            </a:pPr>
-            <a:r>
-              <a:rPr lang="en-US" sz="1600" dirty="0">
-                <a:solidFill>
-                  <a:srgbClr val="2C3249"/>
-                </a:solidFill>
-                <a:latin typeface="Martel Sans" pitchFamily="34" charset="0"/>
-                <a:ea typeface="Martel Sans" pitchFamily="34" charset="-122"/>
-                <a:cs typeface="Martel Sans" pitchFamily="34" charset="-120"/>
-              </a:rPr>
-              <a:t>Внедрено разграничение доступа по ролям и механизм уведомлений через FCM.</a:t>
-            </a:r>
-            <a:endParaRPr lang="en-US" sz="1600" dirty="0"/>
-          </a:p>
-          <a:p>
-            <a:pPr marL="342900" indent="-342900" algn="l">
-              <a:lnSpc>
-                <a:spcPct val="150000"/>
-              </a:lnSpc>
-              <a:buSzPct val="100000"/>
-              <a:buFontTx/>
-              <a:buChar char="―"/>
-            </a:pPr>
-            <a:r>
-              <a:rPr lang="en-US" sz="1600" dirty="0">
-                <a:solidFill>
-                  <a:srgbClr val="2C3249"/>
-                </a:solidFill>
-                <a:latin typeface="Martel Sans" pitchFamily="34" charset="0"/>
-                <a:ea typeface="Martel Sans" pitchFamily="34" charset="-122"/>
-                <a:cs typeface="Martel Sans" pitchFamily="34" charset="-120"/>
-              </a:rPr>
-              <a:t>Снижение бумажного документооборота, уменьшение времени обслуживания и повышение качества медицинского сопровождения — готовность к пилотному внедрению.</a:t>
-            </a:r>
-            <a:endParaRPr lang="en-US" sz="1600" dirty="0"/>
+            <a:endParaRPr lang="en-US" sz="1400" dirty="0"/>
           </a:p>
         </p:txBody>
       </p:sp>
       <p:sp>
         <p:nvSpPr>
-          <p:cNvPr id="9" name="Text 1">
-            <a:extLst>
-              <a:ext uri="{FF2B5EF4-FFF2-40B4-BE49-F238E27FC236}">
-                <a16:creationId xmlns:a16="http://schemas.microsoft.com/office/drawing/2014/main" id="{B4EB57EA-A47A-4DC5-A41E-2B0DF4A8E8AD}"/>
-              </a:ext>
-            </a:extLst>
-          </p:cNvPr>
+          <p:cNvPr id="6" name="Text 3"/>
           <p:cNvSpPr/>
           <p:nvPr/>
         </p:nvSpPr>
         <p:spPr>
           <a:xfrm>
-            <a:off x="3580432" y="1554482"/>
-            <a:ext cx="5103093" cy="327659"/>
+            <a:off x="464939" y="710108"/>
+            <a:ext cx="8154326" cy="4181611"/>
           </a:xfrm>
           <a:prstGeom prst="rect">
             <a:avLst/>
@@ -5375,50 +5431,142 @@
           </a:bodyPr>
           <a:lstStyle/>
           <a:p>
-            <a:pPr marL="0" indent="0" algn="l">
+            <a:pPr marL="285750" indent="-285750">
               <a:lnSpc>
-                <a:spcPct val="129000"/>
+                <a:spcPct val="111000"/>
               </a:lnSpc>
-              <a:buNone/>
+              <a:buFont typeface="Kanit Light" panose="020B0604020202020204" charset="-34"/>
+              <a:buChar char="‒"/>
             </a:pPr>
             <a:r>
-              <a:rPr lang="ru-RU" sz="1600" dirty="0">
+              <a:rPr lang="ru-RU" dirty="0">
                 <a:solidFill>
                   <a:srgbClr val="2C3249"/>
                 </a:solidFill>
-                <a:latin typeface="Martel Sans" pitchFamily="34" charset="0"/>
-                <a:ea typeface="Martel Sans" pitchFamily="34" charset="-122"/>
-                <a:cs typeface="Martel Sans" pitchFamily="34" charset="-120"/>
-              </a:rPr>
-              <a:t>Основные </a:t>
-            </a:r>
-            <a:r>
-              <a:rPr lang="ru-RU" sz="1600" dirty="0" err="1">
+                <a:latin typeface="Kanit Light" pitchFamily="34" charset="0"/>
+                <a:ea typeface="Kanit Light" pitchFamily="34" charset="-122"/>
+                <a:cs typeface="Kanit Light" pitchFamily="34" charset="-120"/>
+              </a:rPr>
+              <a:t>Запись на приём — только по телефону, линия перегружена, учёт в бумажном журнале. При отмене «окна» не заполняются.</a:t>
+            </a:r>
+          </a:p>
+          <a:p>
+            <a:pPr marL="285750" indent="-285750">
+              <a:lnSpc>
+                <a:spcPct val="111000"/>
+              </a:lnSpc>
+              <a:buFont typeface="Kanit Light" panose="020B0604020202020204" charset="-34"/>
+              <a:buChar char="‒"/>
+            </a:pPr>
+            <a:r>
+              <a:rPr lang="ru-RU" dirty="0">
                 <a:solidFill>
                   <a:srgbClr val="2C3249"/>
                 </a:solidFill>
-                <a:latin typeface="Martel Sans" pitchFamily="34" charset="0"/>
-                <a:ea typeface="Martel Sans" pitchFamily="34" charset="-122"/>
-                <a:cs typeface="Martel Sans" pitchFamily="34" charset="-120"/>
-              </a:rPr>
-              <a:t>резаультаты</a:t>
-            </a:r>
-            <a:r>
-              <a:rPr lang="ru-RU" sz="1600" dirty="0">
+                <a:latin typeface="Kanit Light" pitchFamily="34" charset="0"/>
+                <a:ea typeface="Kanit Light" pitchFamily="34" charset="-122"/>
+                <a:cs typeface="Kanit Light" pitchFamily="34" charset="-120"/>
+              </a:rPr>
+              <a:t>Медицинские карты — бумажные, хранятся в картотеке. Почерк врачей неразборчив, карты теряются или перемещаются между кабинетами.</a:t>
+            </a:r>
+          </a:p>
+          <a:p>
+            <a:pPr marL="285750" indent="-285750">
+              <a:lnSpc>
+                <a:spcPct val="111000"/>
+              </a:lnSpc>
+              <a:buFont typeface="Kanit Light" panose="020B0604020202020204" charset="-34"/>
+              <a:buChar char="‒"/>
+            </a:pPr>
+            <a:r>
+              <a:rPr lang="ru-RU" dirty="0">
                 <a:solidFill>
                   <a:srgbClr val="2C3249"/>
                 </a:solidFill>
-                <a:latin typeface="Martel Sans" pitchFamily="34" charset="0"/>
-                <a:ea typeface="Martel Sans" pitchFamily="34" charset="-122"/>
-                <a:cs typeface="Martel Sans" pitchFamily="34" charset="-120"/>
-              </a:rPr>
-              <a:t>:</a:t>
-            </a:r>
-            <a:endParaRPr lang="en-US" sz="1600" dirty="0"/>
+                <a:latin typeface="Kanit Light" pitchFamily="34" charset="0"/>
+                <a:ea typeface="Kanit Light" pitchFamily="34" charset="-122"/>
+                <a:cs typeface="Kanit Light" pitchFamily="34" charset="-120"/>
+              </a:rPr>
+              <a:t>Складской учёт — бумажные журналы прихода-расхода. Контроль сроков годности — визуальный, просрочка выявляется только при отпуске. Инвентаризация раз в квартал.</a:t>
+            </a:r>
+            <a:endParaRPr lang="ru-RU" sz="1600" dirty="0">
+              <a:solidFill>
+                <a:srgbClr val="2C3249"/>
+              </a:solidFill>
+              <a:latin typeface="Kanit Light" pitchFamily="34" charset="0"/>
+              <a:ea typeface="Kanit Light" pitchFamily="34" charset="-122"/>
+              <a:cs typeface="Kanit Light" pitchFamily="34" charset="-120"/>
+            </a:endParaRPr>
+          </a:p>
+          <a:p>
+            <a:pPr marL="285750" indent="-285750">
+              <a:lnSpc>
+                <a:spcPct val="111000"/>
+              </a:lnSpc>
+              <a:buFont typeface="Kanit Light" panose="020B0604020202020204" charset="-34"/>
+              <a:buChar char="‒"/>
+            </a:pPr>
+            <a:r>
+              <a:rPr lang="ru-RU" dirty="0">
+                <a:solidFill>
+                  <a:srgbClr val="2C3249"/>
+                </a:solidFill>
+                <a:latin typeface="Kanit Light" pitchFamily="34" charset="0"/>
+                <a:ea typeface="Kanit Light" pitchFamily="34" charset="-122"/>
+                <a:cs typeface="Kanit Light" pitchFamily="34" charset="-120"/>
+              </a:rPr>
+              <a:t>Учёт выручки — ручной подсчёт по чекам в конце смены. Нет единой базы задолженностей.</a:t>
+            </a:r>
+          </a:p>
+          <a:p>
+            <a:pPr marL="285750" indent="-285750">
+              <a:lnSpc>
+                <a:spcPct val="111000"/>
+              </a:lnSpc>
+              <a:buFont typeface="Kanit Light" panose="020B0604020202020204" charset="-34"/>
+              <a:buChar char="‒"/>
+            </a:pPr>
+            <a:r>
+              <a:rPr lang="ru-RU" dirty="0">
+                <a:solidFill>
+                  <a:srgbClr val="2C3249"/>
+                </a:solidFill>
+                <a:latin typeface="Kanit Light" pitchFamily="34" charset="0"/>
+                <a:ea typeface="Kanit Light" pitchFamily="34" charset="-122"/>
+                <a:cs typeface="Kanit Light" pitchFamily="34" charset="-120"/>
+              </a:rPr>
+              <a:t>Направления на анализы — бумажные бланки. Результаты вклеиваются в карту или теряются.</a:t>
+            </a:r>
+          </a:p>
+          <a:p>
+            <a:pPr marL="285750" indent="-285750">
+              <a:lnSpc>
+                <a:spcPct val="111000"/>
+              </a:lnSpc>
+              <a:buFont typeface="Kanit Light" panose="020B0604020202020204" charset="-34"/>
+              <a:buChar char="‒"/>
+            </a:pPr>
+            <a:r>
+              <a:rPr lang="ru-RU" dirty="0">
+                <a:solidFill>
+                  <a:srgbClr val="2C3249"/>
+                </a:solidFill>
+                <a:latin typeface="Kanit Light" pitchFamily="34" charset="0"/>
+                <a:ea typeface="Kanit Light" pitchFamily="34" charset="-122"/>
+                <a:cs typeface="Kanit Light" pitchFamily="34" charset="-120"/>
+              </a:rPr>
+              <a:t>Связь с клиентами — только телефон. Напоминания о вакцинации не отправляются. Клиенты не имеют доступа к истории лечения.</a:t>
+            </a:r>
+            <a:endParaRPr lang="en-US" dirty="0"/>
           </a:p>
         </p:txBody>
       </p:sp>
     </p:spTree>
+    <p:extLst>
+      <p:ext uri="{BB962C8B-B14F-4D97-AF65-F5344CB8AC3E}">
+        <p14:creationId xmlns:p14="http://schemas.microsoft.com/office/powerpoint/2010/main" val="2537578251"/>
+      </p:ext>
+    </p:extLst>
   </p:cSld>
   <p:clrMapOvr>
     <a:masterClrMapping/>
@@ -5426,7 +5574,7 @@
 </p:sld>
 </file>
 
-<file path=ppt/slides/slide2.xml><?xml version="1.0" encoding="utf-8"?>
+<file path=ppt/slides/slide3.xml><?xml version="1.0" encoding="utf-8"?>
 <p:sld xmlns:a="http://schemas.openxmlformats.org/drawingml/2006/main" xmlns:r="http://schemas.openxmlformats.org/officeDocument/2006/relationships" xmlns:p="http://schemas.openxmlformats.org/presentationml/2006/main">
   <p:cSld name="Slide 2">
     <p:spTree>
@@ -5679,7 +5827,7 @@
 </p:sld>
 </file>
 
-<file path=ppt/slides/slide3.xml><?xml version="1.0" encoding="utf-8"?>
+<file path=ppt/slides/slide4.xml><?xml version="1.0" encoding="utf-8"?>
 <p:sld xmlns:a="http://schemas.openxmlformats.org/drawingml/2006/main" xmlns:r="http://schemas.openxmlformats.org/officeDocument/2006/relationships" xmlns:p="http://schemas.openxmlformats.org/presentationml/2006/main">
   <p:cSld>
     <p:spTree>
@@ -7038,7 +7186,7 @@
 </p:sld>
 </file>
 
-<file path=ppt/slides/slide4.xml><?xml version="1.0" encoding="utf-8"?>
+<file path=ppt/slides/slide5.xml><?xml version="1.0" encoding="utf-8"?>
 <p:sld xmlns:a="http://schemas.openxmlformats.org/drawingml/2006/main" xmlns:r="http://schemas.openxmlformats.org/officeDocument/2006/relationships" xmlns:p="http://schemas.openxmlformats.org/presentationml/2006/main">
   <p:cSld name="Slide 3">
     <p:spTree>
@@ -7214,7 +7362,7 @@
 </p:sld>
 </file>
 
-<file path=ppt/slides/slide5.xml><?xml version="1.0" encoding="utf-8"?>
+<file path=ppt/slides/slide6.xml><?xml version="1.0" encoding="utf-8"?>
 <p:sld xmlns:a="http://schemas.openxmlformats.org/drawingml/2006/main" xmlns:r="http://schemas.openxmlformats.org/officeDocument/2006/relationships" xmlns:p="http://schemas.openxmlformats.org/presentationml/2006/main">
   <p:cSld>
     <p:spTree>
@@ -7396,7 +7544,7 @@
 </p:sld>
 </file>
 
-<file path=ppt/slides/slide6.xml><?xml version="1.0" encoding="utf-8"?>
+<file path=ppt/slides/slide7.xml><?xml version="1.0" encoding="utf-8"?>
 <p:sld xmlns:a="http://schemas.openxmlformats.org/drawingml/2006/main" xmlns:r="http://schemas.openxmlformats.org/officeDocument/2006/relationships" xmlns:p="http://schemas.openxmlformats.org/presentationml/2006/main">
   <p:cSld>
     <p:spTree>
@@ -7518,7 +7666,7 @@
 </p:sld>
 </file>
 
-<file path=ppt/slides/slide7.xml><?xml version="1.0" encoding="utf-8"?>
+<file path=ppt/slides/slide8.xml><?xml version="1.0" encoding="utf-8"?>
 <p:sld xmlns:a="http://schemas.openxmlformats.org/drawingml/2006/main" xmlns:r="http://schemas.openxmlformats.org/officeDocument/2006/relationships" xmlns:p="http://schemas.openxmlformats.org/presentationml/2006/main">
   <p:cSld>
     <p:spTree>
@@ -7640,7 +7788,7 @@
 </p:sld>
 </file>
 
-<file path=ppt/slides/slide8.xml><?xml version="1.0" encoding="utf-8"?>
+<file path=ppt/slides/slide9.xml><?xml version="1.0" encoding="utf-8"?>
 <p:sld xmlns:a="http://schemas.openxmlformats.org/drawingml/2006/main" xmlns:r="http://schemas.openxmlformats.org/officeDocument/2006/relationships" xmlns:p="http://schemas.openxmlformats.org/presentationml/2006/main">
   <p:cSld>
     <p:spTree>
@@ -7753,150 +7901,6 @@
     <p:extLst>
       <p:ext uri="{BB962C8B-B14F-4D97-AF65-F5344CB8AC3E}">
         <p14:creationId xmlns:p14="http://schemas.microsoft.com/office/powerpoint/2010/main" val="4277544461"/>
-      </p:ext>
-    </p:extLst>
-  </p:cSld>
-  <p:clrMapOvr>
-    <a:masterClrMapping/>
-  </p:clrMapOvr>
-</p:sld>
-</file>
-
-<file path=ppt/slides/slide9.xml><?xml version="1.0" encoding="utf-8"?>
-<p:sld xmlns:a="http://schemas.openxmlformats.org/drawingml/2006/main" xmlns:r="http://schemas.openxmlformats.org/officeDocument/2006/relationships" xmlns:p="http://schemas.openxmlformats.org/presentationml/2006/main">
-  <p:cSld>
-    <p:spTree>
-      <p:nvGrpSpPr>
-        <p:cNvPr id="1" name=""/>
-        <p:cNvGrpSpPr/>
-        <p:nvPr/>
-      </p:nvGrpSpPr>
-      <p:grpSpPr>
-        <a:xfrm>
-          <a:off x="0" y="0"/>
-          <a:ext cx="0" cy="0"/>
-          <a:chOff x="0" y="0"/>
-          <a:chExt cx="0" cy="0"/>
-        </a:xfrm>
-      </p:grpSpPr>
-      <p:sp>
-        <p:nvSpPr>
-          <p:cNvPr id="2" name="Shape 0"/>
-          <p:cNvSpPr/>
-          <p:nvPr/>
-        </p:nvSpPr>
-        <p:spPr>
-          <a:xfrm>
-            <a:off x="0" y="1138204"/>
-            <a:ext cx="9144000" cy="4005295"/>
-          </a:xfrm>
-          <a:prstGeom prst="rect">
-            <a:avLst/>
-          </a:prstGeom>
-          <a:solidFill>
-            <a:srgbClr val="DFECE9"/>
-          </a:solidFill>
-          <a:ln/>
-        </p:spPr>
-      </p:sp>
-      <p:sp>
-        <p:nvSpPr>
-          <p:cNvPr id="4" name="Text 1"/>
-          <p:cNvSpPr/>
-          <p:nvPr/>
-        </p:nvSpPr>
-        <p:spPr>
-          <a:xfrm>
-            <a:off x="338903" y="76043"/>
-            <a:ext cx="8670814" cy="708720"/>
-          </a:xfrm>
-          <a:prstGeom prst="rect">
-            <a:avLst/>
-          </a:prstGeom>
-          <a:noFill/>
-          <a:ln/>
-        </p:spPr>
-        <p:txBody>
-          <a:bodyPr wrap="square" lIns="0" tIns="0" rIns="0" bIns="0" rtlCol="0" anchor="t">
-            <a:noAutofit/>
-          </a:bodyPr>
-          <a:lstStyle/>
-          <a:p>
-            <a:pPr marL="0" indent="0" algn="l">
-              <a:lnSpc>
-                <a:spcPct val="104000"/>
-              </a:lnSpc>
-              <a:buNone/>
-            </a:pPr>
-            <a:r>
-              <a:rPr lang="ru-RU" sz="3200" dirty="0">
-                <a:solidFill>
-                  <a:srgbClr val="272D45"/>
-                </a:solidFill>
-                <a:latin typeface="Kanit Light" pitchFamily="34" charset="0"/>
-                <a:ea typeface="Kanit Light" pitchFamily="34" charset="-122"/>
-                <a:cs typeface="Kanit Light" pitchFamily="34" charset="-120"/>
-              </a:rPr>
-              <a:t>Фрагмент </a:t>
-            </a:r>
-            <a:r>
-              <a:rPr lang="en-US" sz="3200" dirty="0">
-                <a:solidFill>
-                  <a:srgbClr val="272D45"/>
-                </a:solidFill>
-                <a:latin typeface="Kanit Light" pitchFamily="34" charset="0"/>
-                <a:ea typeface="Kanit Light" pitchFamily="34" charset="-122"/>
-                <a:cs typeface="Kanit Light" pitchFamily="34" charset="-120"/>
-              </a:rPr>
-              <a:t>ER-</a:t>
-            </a:r>
-            <a:r>
-              <a:rPr lang="ru-RU" sz="3200" dirty="0">
-                <a:solidFill>
-                  <a:srgbClr val="272D45"/>
-                </a:solidFill>
-                <a:latin typeface="Kanit Light" pitchFamily="34" charset="0"/>
-                <a:ea typeface="Kanit Light" pitchFamily="34" charset="-122"/>
-                <a:cs typeface="Kanit Light" pitchFamily="34" charset="-120"/>
-              </a:rPr>
-              <a:t>диаграммы «Медицинские записи»</a:t>
-            </a:r>
-            <a:endParaRPr lang="en-US" sz="3200" dirty="0"/>
-          </a:p>
-        </p:txBody>
-      </p:sp>
-      <p:pic>
-        <p:nvPicPr>
-          <p:cNvPr id="5" name="Рисунок 4">
-            <a:extLst>
-              <a:ext uri="{FF2B5EF4-FFF2-40B4-BE49-F238E27FC236}">
-                <a16:creationId xmlns:a16="http://schemas.microsoft.com/office/drawing/2014/main" id="{3F23E548-3C79-472C-9AF1-6CE5FABCC6D8}"/>
-              </a:ext>
-            </a:extLst>
-          </p:cNvPr>
-          <p:cNvPicPr/>
-          <p:nvPr/>
-        </p:nvPicPr>
-        <p:blipFill>
-          <a:blip r:embed="rId3"/>
-          <a:stretch>
-            <a:fillRect/>
-          </a:stretch>
-        </p:blipFill>
-        <p:spPr bwMode="auto">
-          <a:xfrm>
-            <a:off x="338904" y="1182965"/>
-            <a:ext cx="8536532" cy="3884492"/>
-          </a:xfrm>
-          <a:prstGeom prst="rect">
-            <a:avLst/>
-          </a:prstGeom>
-        </p:spPr>
-      </p:pic>
-    </p:spTree>
-    <p:extLst>
-      <p:ext uri="{BB962C8B-B14F-4D97-AF65-F5344CB8AC3E}">
-        <p14:creationId xmlns:p14="http://schemas.microsoft.com/office/powerpoint/2010/main" val="3599697436"/>
       </p:ext>
     </p:extLst>
   </p:cSld>
